--- a/public/fun/pack/pptx/birthdaypro/돌잔치프리미엄_29_감사인사중심_코냑크림.pptx
+++ b/public/fun/pack/pptx/birthdaypro/돌잔치프리미엄_29_감사인사중심_코냑크림.pptx
@@ -112,12 +112,12 @@
   <p:extLst>
     <p:ext uri="{521415D9-36F7-43E2-AB2F-B90AF26B5E84}">
       <p14:sectionLst xmlns:p14="http://schemas.microsoft.com/office/powerpoint/2010/main">
-        <p14:section name="시작" id="{B2B5148F-5BFE-403A-90A9-DDA5AAD2DF82}">
+        <p14:section name="시작" id="{223D4E7E-7D39-4F31-9EDC-F8536730E296}">
           <p14:sldIdLst>
             <p14:sldId id="256"/>
           </p14:sldIdLst>
         </p14:section>
-        <p14:section name="본문" id="{DCDF5FD8-671D-4F90-A7B8-284F60620CEE}">
+        <p14:section name="본문" id="{76A3069B-9C74-4646-AA4A-2282E5FBADA1}">
           <p14:sldIdLst>
             <p14:sldId id="257"/>
             <p14:sldId id="258"/>
@@ -125,7 +125,7 @@
             <p14:sldId id="260"/>
           </p14:sldIdLst>
         </p14:section>
-        <p14:section name="마무리" id="{2F0FD972-AC2B-44C5-93CF-3C2C557CC269}">
+        <p14:section name="마무리" id="{4B15D231-3A80-4204-8E14-4264F7F08093}">
           <p14:sldIdLst>
             <p14:sldId id="261"/>
           </p14:sldIdLst>
@@ -1500,7 +1500,7 @@
             </a:lvl1pPr>
           </a:lstStyle>
           <a:p>
-            <a:fld id="{0E94EC55-DBDD-4E47-B9B9-412AFCD7ABA7}" type="slidenum">
+            <a:fld id="{D3B8E137-B048-488A-855F-D7F9CD2DD0E6}" type="slidenum">
               <a:rPr lang="en-US"/>
               <a:t>‹#›</a:t>
             </a:fld>
@@ -2291,7 +2291,7 @@
             </a:lvl1pPr>
           </a:lstStyle>
           <a:p>
-            <a:fld id="{F7450E76-5A85-4663-87A3-D32A02912C80}" type="slidenum">
+            <a:fld id="{2AF01179-D245-4359-82C1-6DD9CBD4A728}" type="slidenum">
               <a:rPr lang="en-US"/>
               <a:t>‹#›</a:t>
             </a:fld>
@@ -3044,7 +3044,7 @@
             </a:lvl1pPr>
           </a:lstStyle>
           <a:p>
-            <a:fld id="{0A75F6F9-82CA-4DA1-9F6A-A303440F4BB3}" type="slidenum">
+            <a:fld id="{65121BC6-D1FB-4C19-B85A-B56A922C82B9}" type="slidenum">
               <a:rPr lang="en-US"/>
               <a:t>‹#›</a:t>
             </a:fld>
@@ -4021,7 +4021,7 @@
           <a:p>
             <a:r>
               <a:rPr lang="ko-KR"/>
-              <a:t>아기 이름 · 0000. 00. 00</a:t>
+              <a:t>아기 이름 · 날짜 입력</a:t>
             </a:r>
           </a:p>
           <a:p>
@@ -4182,7 +4182,7 @@
           <a:bodyPr/>
           <a:lstStyle/>
           <a:p>
-            <a:fld id="{CE4FC40A-647D-43BD-A5F5-032DAFD05876}" type="slidenum">
+            <a:fld id="{1297D9CA-E8DC-457A-B50D-50342DF18600}" type="slidenum">
               <a:rPr lang="en-US"/>
               <a:t>‹#›</a:t>
             </a:fld>
@@ -4782,7 +4782,7 @@
           <a:bodyPr/>
           <a:lstStyle/>
           <a:p>
-            <a:fld id="{A5D4FBE9-DD59-4ED8-9067-3EA586DAE66E}" type="slidenum">
+            <a:fld id="{480A0521-9B0D-4E6D-B609-019269C5FE90}" type="slidenum">
               <a:rPr lang="en-US"/>
               <a:t>‹#›</a:t>
             </a:fld>
@@ -5112,7 +5112,7 @@
           <a:bodyPr/>
           <a:lstStyle/>
           <a:p>
-            <a:fld id="{05EE074C-AC79-4BC7-94A4-72F61364919C}" type="slidenum">
+            <a:fld id="{3824E88F-4C54-4079-AF7E-075F974908AD}" type="slidenum">
               <a:rPr lang="en-US"/>
               <a:t>‹#›</a:t>
             </a:fld>
@@ -5970,7 +5970,7 @@
           <a:bodyPr/>
           <a:lstStyle/>
           <a:p>
-            <a:fld id="{CE709209-6CF8-498D-A0C2-CA82C079A572}" type="slidenum">
+            <a:fld id="{42AF8F16-2C26-40F3-9406-9164DA3E8E9D}" type="slidenum">
               <a:rPr lang="en-US"/>
               <a:t>‹#›</a:t>
             </a:fld>
